--- a/Лекции/ООП 2 лек 5.pptx
+++ b/Лекции/ООП 2 лек 5.pptx
@@ -4095,7 +4095,7 @@
           <p:cNvPr id="9" name="Номер слайда 3">
             <a:extLst>
               <a:ext uri="{FF2B5EF4-FFF2-40B4-BE49-F238E27FC236}">
-                <a16:creationId xmlns:a16="http://schemas.microsoft.com/office/drawing/2014/main" xmlns="" id="{3DF48714-7FE4-4364-BF9D-28B9C9E2979D}"/>
+                <a16:creationId xmlns:a16="http://schemas.microsoft.com/office/drawing/2014/main" id="{3DF48714-7FE4-4364-BF9D-28B9C9E2979D}"/>
               </a:ext>
             </a:extLst>
           </p:cNvPr>
@@ -4234,7 +4234,7 @@
           <p:cNvPr id="7" name="Номер слайда 3">
             <a:extLst>
               <a:ext uri="{FF2B5EF4-FFF2-40B4-BE49-F238E27FC236}">
-                <a16:creationId xmlns:a16="http://schemas.microsoft.com/office/drawing/2014/main" xmlns="" id="{3DF48714-7FE4-4364-BF9D-28B9C9E2979D}"/>
+                <a16:creationId xmlns:a16="http://schemas.microsoft.com/office/drawing/2014/main" id="{3DF48714-7FE4-4364-BF9D-28B9C9E2979D}"/>
               </a:ext>
             </a:extLst>
           </p:cNvPr>
@@ -4516,7 +4516,7 @@
           <p:cNvPr id="9" name="Номер слайда 3">
             <a:extLst>
               <a:ext uri="{FF2B5EF4-FFF2-40B4-BE49-F238E27FC236}">
-                <a16:creationId xmlns:a16="http://schemas.microsoft.com/office/drawing/2014/main" xmlns="" id="{3DF48714-7FE4-4364-BF9D-28B9C9E2979D}"/>
+                <a16:creationId xmlns:a16="http://schemas.microsoft.com/office/drawing/2014/main" id="{3DF48714-7FE4-4364-BF9D-28B9C9E2979D}"/>
               </a:ext>
             </a:extLst>
           </p:cNvPr>
@@ -4953,7 +4953,7 @@
           <p:cNvPr id="17" name="Заголовок 16">
             <a:extLst>
               <a:ext uri="{FF2B5EF4-FFF2-40B4-BE49-F238E27FC236}">
-                <a16:creationId xmlns:a16="http://schemas.microsoft.com/office/drawing/2014/main" xmlns="" id="{D630362D-1F09-46B4-9DE4-AEA483AC82FD}"/>
+                <a16:creationId xmlns:a16="http://schemas.microsoft.com/office/drawing/2014/main" id="{D630362D-1F09-46B4-9DE4-AEA483AC82FD}"/>
               </a:ext>
             </a:extLst>
           </p:cNvPr>
@@ -5186,7 +5186,7 @@
           <p:cNvPr id="12" name="TextBox 11">
             <a:extLst>
               <a:ext uri="{FF2B5EF4-FFF2-40B4-BE49-F238E27FC236}">
-                <a16:creationId xmlns:a16="http://schemas.microsoft.com/office/drawing/2014/main" xmlns="" id="{F7B00361-5492-4290-B470-295172C16526}"/>
+                <a16:creationId xmlns:a16="http://schemas.microsoft.com/office/drawing/2014/main" id="{F7B00361-5492-4290-B470-295172C16526}"/>
               </a:ext>
             </a:extLst>
           </p:cNvPr>
@@ -7347,9 +7347,27 @@
             <a:tbl>
               <a:tblPr/>
               <a:tblGrid>
-                <a:gridCol w="3505200"/>
-                <a:gridCol w="3505200"/>
-                <a:gridCol w="3505200"/>
+                <a:gridCol w="3505200">
+                  <a:extLst>
+                    <a:ext uri="{9D8B030D-6E8A-4147-A177-3AD203B41FA5}">
+                      <a16:colId xmlns:a16="http://schemas.microsoft.com/office/drawing/2014/main" val="20000"/>
+                    </a:ext>
+                  </a:extLst>
+                </a:gridCol>
+                <a:gridCol w="3505200">
+                  <a:extLst>
+                    <a:ext uri="{9D8B030D-6E8A-4147-A177-3AD203B41FA5}">
+                      <a16:colId xmlns:a16="http://schemas.microsoft.com/office/drawing/2014/main" val="20001"/>
+                    </a:ext>
+                  </a:extLst>
+                </a:gridCol>
+                <a:gridCol w="3505200">
+                  <a:extLst>
+                    <a:ext uri="{9D8B030D-6E8A-4147-A177-3AD203B41FA5}">
+                      <a16:colId xmlns:a16="http://schemas.microsoft.com/office/drawing/2014/main" val="20002"/>
+                    </a:ext>
+                  </a:extLst>
+                </a:gridCol>
               </a:tblGrid>
               <a:tr h="0">
                 <a:tc>
@@ -7534,6 +7552,11 @@
                     </a:solidFill>
                   </a:tcPr>
                 </a:tc>
+                <a:extLst>
+                  <a:ext uri="{0D108BD9-81ED-4DB2-BD59-A6C34878D82A}">
+                    <a16:rowId xmlns:a16="http://schemas.microsoft.com/office/drawing/2014/main" val="10000"/>
+                  </a:ext>
+                </a:extLst>
               </a:tr>
               <a:tr h="0">
                 <a:tc>
@@ -7722,6 +7745,11 @@
                     </a:solidFill>
                   </a:tcPr>
                 </a:tc>
+                <a:extLst>
+                  <a:ext uri="{0D108BD9-81ED-4DB2-BD59-A6C34878D82A}">
+                    <a16:rowId xmlns:a16="http://schemas.microsoft.com/office/drawing/2014/main" val="10001"/>
+                  </a:ext>
+                </a:extLst>
               </a:tr>
               <a:tr h="0">
                 <a:tc>
@@ -7896,6 +7924,11 @@
                     </a:solidFill>
                   </a:tcPr>
                 </a:tc>
+                <a:extLst>
+                  <a:ext uri="{0D108BD9-81ED-4DB2-BD59-A6C34878D82A}">
+                    <a16:rowId xmlns:a16="http://schemas.microsoft.com/office/drawing/2014/main" val="10002"/>
+                  </a:ext>
+                </a:extLst>
               </a:tr>
               <a:tr h="0">
                 <a:tc>
@@ -8084,6 +8117,11 @@
                     </a:solidFill>
                   </a:tcPr>
                 </a:tc>
+                <a:extLst>
+                  <a:ext uri="{0D108BD9-81ED-4DB2-BD59-A6C34878D82A}">
+                    <a16:rowId xmlns:a16="http://schemas.microsoft.com/office/drawing/2014/main" val="10003"/>
+                  </a:ext>
+                </a:extLst>
               </a:tr>
             </a:tbl>
           </a:graphicData>
@@ -9627,9 +9665,27 @@
             <a:tbl>
               <a:tblPr/>
               <a:tblGrid>
-                <a:gridCol w="3644901"/>
-                <a:gridCol w="4042833"/>
-                <a:gridCol w="3843867"/>
+                <a:gridCol w="3644901">
+                  <a:extLst>
+                    <a:ext uri="{9D8B030D-6E8A-4147-A177-3AD203B41FA5}">
+                      <a16:colId xmlns:a16="http://schemas.microsoft.com/office/drawing/2014/main" val="20000"/>
+                    </a:ext>
+                  </a:extLst>
+                </a:gridCol>
+                <a:gridCol w="4042833">
+                  <a:extLst>
+                    <a:ext uri="{9D8B030D-6E8A-4147-A177-3AD203B41FA5}">
+                      <a16:colId xmlns:a16="http://schemas.microsoft.com/office/drawing/2014/main" val="20001"/>
+                    </a:ext>
+                  </a:extLst>
+                </a:gridCol>
+                <a:gridCol w="3843867">
+                  <a:extLst>
+                    <a:ext uri="{9D8B030D-6E8A-4147-A177-3AD203B41FA5}">
+                      <a16:colId xmlns:a16="http://schemas.microsoft.com/office/drawing/2014/main" val="20002"/>
+                    </a:ext>
+                  </a:extLst>
+                </a:gridCol>
               </a:tblGrid>
               <a:tr h="0">
                 <a:tc>
@@ -9807,6 +9863,11 @@
                     </a:solidFill>
                   </a:tcPr>
                 </a:tc>
+                <a:extLst>
+                  <a:ext uri="{0D108BD9-81ED-4DB2-BD59-A6C34878D82A}">
+                    <a16:rowId xmlns:a16="http://schemas.microsoft.com/office/drawing/2014/main" val="10000"/>
+                  </a:ext>
+                </a:extLst>
               </a:tr>
               <a:tr h="0">
                 <a:tc>
@@ -10001,6 +10062,11 @@
                     </a:solidFill>
                   </a:tcPr>
                 </a:tc>
+                <a:extLst>
+                  <a:ext uri="{0D108BD9-81ED-4DB2-BD59-A6C34878D82A}">
+                    <a16:rowId xmlns:a16="http://schemas.microsoft.com/office/drawing/2014/main" val="10001"/>
+                  </a:ext>
+                </a:extLst>
               </a:tr>
               <a:tr h="0">
                 <a:tc>
@@ -10185,6 +10251,11 @@
                     </a:solidFill>
                   </a:tcPr>
                 </a:tc>
+                <a:extLst>
+                  <a:ext uri="{0D108BD9-81ED-4DB2-BD59-A6C34878D82A}">
+                    <a16:rowId xmlns:a16="http://schemas.microsoft.com/office/drawing/2014/main" val="10002"/>
+                  </a:ext>
+                </a:extLst>
               </a:tr>
               <a:tr h="0">
                 <a:tc>
@@ -10369,6 +10440,11 @@
                     </a:solidFill>
                   </a:tcPr>
                 </a:tc>
+                <a:extLst>
+                  <a:ext uri="{0D108BD9-81ED-4DB2-BD59-A6C34878D82A}">
+                    <a16:rowId xmlns:a16="http://schemas.microsoft.com/office/drawing/2014/main" val="10003"/>
+                  </a:ext>
+                </a:extLst>
               </a:tr>
             </a:tbl>
           </a:graphicData>
